--- a/static/brand/templates/value-add-pitch-investors-clients.pptx
+++ b/static/brand/templates/value-add-pitch-investors-clients.pptx
@@ -3159,7 +3159,7 @@
         </p:blipFill>
         <p:spPr>
           <a:xfrm>
-            <a:off x="2834640" y="2880360"/>
+            <a:off x="3520440" y="2880360"/>
             <a:ext cx="2103120" cy="2103120"/>
           </a:xfrm>
           <a:prstGeom prst="rect">
@@ -3175,7 +3175,7 @@
         </p:nvSpPr>
         <p:spPr>
           <a:xfrm>
-            <a:off x="3931920" y="4709160"/>
+            <a:off x="3931920" y="5166360"/>
             <a:ext cx="1280160" cy="182880"/>
           </a:xfrm>
           <a:prstGeom prst="rect">
@@ -3218,7 +3218,7 @@
         </p:nvSpPr>
         <p:spPr>
           <a:xfrm>
-            <a:off x="365760" y="4937760"/>
+            <a:off x="365760" y="5349240"/>
             <a:ext cx="8412480" cy="457200"/>
           </a:xfrm>
           <a:prstGeom prst="rect">
@@ -3253,7 +3253,7 @@
         </p:nvSpPr>
         <p:spPr>
           <a:xfrm>
-            <a:off x="365760" y="5440680"/>
+            <a:off x="365760" y="5852160"/>
             <a:ext cx="8412480" cy="365760"/>
           </a:xfrm>
           <a:prstGeom prst="rect">
@@ -3479,7 +3479,7 @@
         <p:spPr>
           <a:xfrm>
             <a:off x="731519" y="1691640"/>
-            <a:ext cx="2377440" cy="365760"/>
+            <a:ext cx="2377440" cy="320040"/>
           </a:xfrm>
           <a:prstGeom prst="rect">
             <a:avLst/>
@@ -3513,8 +3513,8 @@
         </p:nvSpPr>
         <p:spPr>
           <a:xfrm>
-            <a:off x="749808" y="1828800"/>
-            <a:ext cx="2340864" cy="4206240"/>
+            <a:off x="749808" y="2121408"/>
+            <a:ext cx="2340864" cy="3931920"/>
           </a:xfrm>
           <a:prstGeom prst="rect">
             <a:avLst/>
@@ -3719,7 +3719,7 @@
         <p:spPr>
           <a:xfrm>
             <a:off x="3520440" y="1691640"/>
-            <a:ext cx="2377440" cy="365760"/>
+            <a:ext cx="2377440" cy="320040"/>
           </a:xfrm>
           <a:prstGeom prst="rect">
             <a:avLst/>
@@ -3753,8 +3753,8 @@
         </p:nvSpPr>
         <p:spPr>
           <a:xfrm>
-            <a:off x="3538728" y="1828800"/>
-            <a:ext cx="2340864" cy="4206240"/>
+            <a:off x="3538728" y="2121408"/>
+            <a:ext cx="2340864" cy="3931920"/>
           </a:xfrm>
           <a:prstGeom prst="rect">
             <a:avLst/>
@@ -3959,7 +3959,7 @@
         <p:spPr>
           <a:xfrm>
             <a:off x="6309360" y="1691640"/>
-            <a:ext cx="2377440" cy="365760"/>
+            <a:ext cx="2377440" cy="320040"/>
           </a:xfrm>
           <a:prstGeom prst="rect">
             <a:avLst/>
@@ -3993,8 +3993,8 @@
         </p:nvSpPr>
         <p:spPr>
           <a:xfrm>
-            <a:off x="6327648" y="1828800"/>
-            <a:ext cx="2340864" cy="4206240"/>
+            <a:off x="6327648" y="2121408"/>
+            <a:ext cx="2340864" cy="3931920"/>
           </a:xfrm>
           <a:prstGeom prst="rect">
             <a:avLst/>
@@ -6482,7 +6482,7 @@
         </p:blipFill>
         <p:spPr>
           <a:xfrm>
-            <a:off x="3246120" y="3611880"/>
+            <a:off x="3429000" y="3611880"/>
             <a:ext cx="2286000" cy="2286000"/>
           </a:xfrm>
           <a:prstGeom prst="rect">

--- a/static/brand/templates/value-add-pitch-investors-clients.pptx
+++ b/static/brand/templates/value-add-pitch-investors-clients.pptx
@@ -3159,8 +3159,8 @@
         </p:blipFill>
         <p:spPr>
           <a:xfrm>
-            <a:off x="3520440" y="2880360"/>
-            <a:ext cx="2103120" cy="2103120"/>
+            <a:off x="2834640" y="2880360"/>
+            <a:ext cx="3318135" cy="2103120"/>
           </a:xfrm>
           <a:prstGeom prst="rect">
             <a:avLst/>
@@ -3175,7 +3175,7 @@
         </p:nvSpPr>
         <p:spPr>
           <a:xfrm>
-            <a:off x="3931920" y="5166360"/>
+            <a:off x="3931920" y="4709160"/>
             <a:ext cx="1280160" cy="182880"/>
           </a:xfrm>
           <a:prstGeom prst="rect">
@@ -3218,7 +3218,7 @@
         </p:nvSpPr>
         <p:spPr>
           <a:xfrm>
-            <a:off x="365760" y="5349240"/>
+            <a:off x="365760" y="4937760"/>
             <a:ext cx="8412480" cy="457200"/>
           </a:xfrm>
           <a:prstGeom prst="rect">
@@ -3253,7 +3253,7 @@
         </p:nvSpPr>
         <p:spPr>
           <a:xfrm>
-            <a:off x="365760" y="5852160"/>
+            <a:off x="365760" y="5440680"/>
             <a:ext cx="8412480" cy="365760"/>
           </a:xfrm>
           <a:prstGeom prst="rect">
@@ -3479,7 +3479,7 @@
         <p:spPr>
           <a:xfrm>
             <a:off x="731519" y="1691640"/>
-            <a:ext cx="2377440" cy="320040"/>
+            <a:ext cx="2377440" cy="365760"/>
           </a:xfrm>
           <a:prstGeom prst="rect">
             <a:avLst/>
@@ -3513,8 +3513,8 @@
         </p:nvSpPr>
         <p:spPr>
           <a:xfrm>
-            <a:off x="749808" y="2121408"/>
-            <a:ext cx="2340864" cy="3931920"/>
+            <a:off x="749808" y="1828800"/>
+            <a:ext cx="2340864" cy="4206240"/>
           </a:xfrm>
           <a:prstGeom prst="rect">
             <a:avLst/>
@@ -3719,7 +3719,7 @@
         <p:spPr>
           <a:xfrm>
             <a:off x="3520440" y="1691640"/>
-            <a:ext cx="2377440" cy="320040"/>
+            <a:ext cx="2377440" cy="365760"/>
           </a:xfrm>
           <a:prstGeom prst="rect">
             <a:avLst/>
@@ -3753,8 +3753,8 @@
         </p:nvSpPr>
         <p:spPr>
           <a:xfrm>
-            <a:off x="3538728" y="2121408"/>
-            <a:ext cx="2340864" cy="3931920"/>
+            <a:off x="3538728" y="1828800"/>
+            <a:ext cx="2340864" cy="4206240"/>
           </a:xfrm>
           <a:prstGeom prst="rect">
             <a:avLst/>
@@ -3959,7 +3959,7 @@
         <p:spPr>
           <a:xfrm>
             <a:off x="6309360" y="1691640"/>
-            <a:ext cx="2377440" cy="320040"/>
+            <a:ext cx="2377440" cy="365760"/>
           </a:xfrm>
           <a:prstGeom prst="rect">
             <a:avLst/>
@@ -3993,8 +3993,8 @@
         </p:nvSpPr>
         <p:spPr>
           <a:xfrm>
-            <a:off x="6327648" y="2121408"/>
-            <a:ext cx="2340864" cy="3931920"/>
+            <a:off x="6327648" y="1828800"/>
+            <a:ext cx="2340864" cy="4206240"/>
           </a:xfrm>
           <a:prstGeom prst="rect">
             <a:avLst/>
@@ -6466,30 +6466,6 @@
           </a:p>
         </p:txBody>
       </p:sp>
-      <p:pic>
-        <p:nvPicPr>
-          <p:cNvPr id="9" name="Picture 8" descr="LightSpeed Holdings official logo lockup"/>
-          <p:cNvPicPr>
-            <a:picLocks noChangeAspect="1"/>
-          </p:cNvPicPr>
-          <p:nvPr/>
-        </p:nvPicPr>
-        <p:blipFill>
-          <a:blip r:embed="rId2"/>
-          <a:stretch>
-            <a:fillRect/>
-          </a:stretch>
-        </p:blipFill>
-        <p:spPr>
-          <a:xfrm>
-            <a:off x="3429000" y="3611880"/>
-            <a:ext cx="2286000" cy="2286000"/>
-          </a:xfrm>
-          <a:prstGeom prst="rect">
-            <a:avLst/>
-          </a:prstGeom>
-        </p:spPr>
-      </p:pic>
     </p:spTree>
   </p:cSld>
   <p:clrMapOvr>

--- a/static/brand/templates/value-add-pitch-investors-clients.pptx
+++ b/static/brand/templates/value-add-pitch-investors-clients.pptx
@@ -3159,8 +3159,8 @@
         </p:blipFill>
         <p:spPr>
           <a:xfrm>
-            <a:off x="2834640" y="2880360"/>
-            <a:ext cx="3318135" cy="2103120"/>
+            <a:off x="3520440" y="2880360"/>
+            <a:ext cx="2103120" cy="2103120"/>
           </a:xfrm>
           <a:prstGeom prst="rect">
             <a:avLst/>
@@ -3175,7 +3175,7 @@
         </p:nvSpPr>
         <p:spPr>
           <a:xfrm>
-            <a:off x="3931920" y="4709160"/>
+            <a:off x="3931920" y="5166360"/>
             <a:ext cx="1280160" cy="182880"/>
           </a:xfrm>
           <a:prstGeom prst="rect">
@@ -3218,7 +3218,7 @@
         </p:nvSpPr>
         <p:spPr>
           <a:xfrm>
-            <a:off x="365760" y="4937760"/>
+            <a:off x="365760" y="5349240"/>
             <a:ext cx="8412480" cy="457200"/>
           </a:xfrm>
           <a:prstGeom prst="rect">
@@ -3253,7 +3253,7 @@
         </p:nvSpPr>
         <p:spPr>
           <a:xfrm>
-            <a:off x="365760" y="5440680"/>
+            <a:off x="365760" y="5852160"/>
             <a:ext cx="8412480" cy="365760"/>
           </a:xfrm>
           <a:prstGeom prst="rect">
@@ -3479,7 +3479,7 @@
         <p:spPr>
           <a:xfrm>
             <a:off x="731519" y="1691640"/>
-            <a:ext cx="2377440" cy="365760"/>
+            <a:ext cx="2377440" cy="320040"/>
           </a:xfrm>
           <a:prstGeom prst="rect">
             <a:avLst/>
@@ -3513,8 +3513,8 @@
         </p:nvSpPr>
         <p:spPr>
           <a:xfrm>
-            <a:off x="749808" y="1828800"/>
-            <a:ext cx="2340864" cy="4206240"/>
+            <a:off x="749808" y="2121408"/>
+            <a:ext cx="2340864" cy="3931920"/>
           </a:xfrm>
           <a:prstGeom prst="rect">
             <a:avLst/>
@@ -3719,7 +3719,7 @@
         <p:spPr>
           <a:xfrm>
             <a:off x="3520440" y="1691640"/>
-            <a:ext cx="2377440" cy="365760"/>
+            <a:ext cx="2377440" cy="320040"/>
           </a:xfrm>
           <a:prstGeom prst="rect">
             <a:avLst/>
@@ -3753,8 +3753,8 @@
         </p:nvSpPr>
         <p:spPr>
           <a:xfrm>
-            <a:off x="3538728" y="1828800"/>
-            <a:ext cx="2340864" cy="4206240"/>
+            <a:off x="3538728" y="2121408"/>
+            <a:ext cx="2340864" cy="3931920"/>
           </a:xfrm>
           <a:prstGeom prst="rect">
             <a:avLst/>
@@ -3959,7 +3959,7 @@
         <p:spPr>
           <a:xfrm>
             <a:off x="6309360" y="1691640"/>
-            <a:ext cx="2377440" cy="365760"/>
+            <a:ext cx="2377440" cy="320040"/>
           </a:xfrm>
           <a:prstGeom prst="rect">
             <a:avLst/>
@@ -3993,8 +3993,8 @@
         </p:nvSpPr>
         <p:spPr>
           <a:xfrm>
-            <a:off x="6327648" y="1828800"/>
-            <a:ext cx="2340864" cy="4206240"/>
+            <a:off x="6327648" y="2121408"/>
+            <a:ext cx="2340864" cy="3931920"/>
           </a:xfrm>
           <a:prstGeom prst="rect">
             <a:avLst/>
@@ -6466,6 +6466,30 @@
           </a:p>
         </p:txBody>
       </p:sp>
+      <p:pic>
+        <p:nvPicPr>
+          <p:cNvPr id="9" name="Picture 8" descr="LightSpeed Holdings official logo lockup"/>
+          <p:cNvPicPr>
+            <a:picLocks noChangeAspect="1"/>
+          </p:cNvPicPr>
+          <p:nvPr/>
+        </p:nvPicPr>
+        <p:blipFill>
+          <a:blip r:embed="rId2"/>
+          <a:stretch>
+            <a:fillRect/>
+          </a:stretch>
+        </p:blipFill>
+        <p:spPr>
+          <a:xfrm>
+            <a:off x="3429000" y="3611880"/>
+            <a:ext cx="2286000" cy="2286000"/>
+          </a:xfrm>
+          <a:prstGeom prst="rect">
+            <a:avLst/>
+          </a:prstGeom>
+        </p:spPr>
+      </p:pic>
     </p:spTree>
   </p:cSld>
   <p:clrMapOvr>
